--- a/catalog/editorial/templates/ed_cards_grid_6.pptx
+++ b/catalog/editorial/templates/ed_cards_grid_6.pptx
@@ -3577,7 +3577,7 @@
           <a:noFill/>
         </p:spPr>
         <p:txBody>
-          <a:bodyPr wrap="square" lIns="18288" rIns="18288" tIns="13716" bIns="13716">
+          <a:bodyPr wrap="square" anchor="t" lIns="18288" rIns="18288" tIns="13716" bIns="13716">
             <a:noAutofit/>
           </a:bodyPr>
           <a:lstStyle/>
@@ -3632,7 +3632,7 @@
           <a:noFill/>
         </p:spPr>
         <p:txBody>
-          <a:bodyPr wrap="square" lIns="18288" rIns="18288" tIns="13716" bIns="13716">
+          <a:bodyPr wrap="square" anchor="t" lIns="18288" rIns="18288" tIns="13716" bIns="13716">
             <a:noAutofit/>
           </a:bodyPr>
           <a:lstStyle/>
@@ -3687,7 +3687,7 @@
           <a:noFill/>
         </p:spPr>
         <p:txBody>
-          <a:bodyPr wrap="square" lIns="18288" rIns="18288" tIns="13716" bIns="13716">
+          <a:bodyPr wrap="square" anchor="t" lIns="18288" rIns="18288" tIns="13716" bIns="13716">
             <a:noAutofit/>
           </a:bodyPr>
           <a:lstStyle/>
@@ -3786,7 +3786,7 @@
           <a:noFill/>
         </p:spPr>
         <p:txBody>
-          <a:bodyPr wrap="square" lIns="18288" rIns="18288" tIns="13716" bIns="13716">
+          <a:bodyPr wrap="square" anchor="t" lIns="18288" rIns="18288" tIns="13716" bIns="13716">
             <a:noAutofit/>
           </a:bodyPr>
           <a:lstStyle/>
@@ -3841,7 +3841,7 @@
           <a:noFill/>
         </p:spPr>
         <p:txBody>
-          <a:bodyPr wrap="square" lIns="18288" rIns="18288" tIns="13716" bIns="13716">
+          <a:bodyPr wrap="square" anchor="t" lIns="18288" rIns="18288" tIns="13716" bIns="13716">
             <a:noAutofit/>
           </a:bodyPr>
           <a:lstStyle/>
@@ -3986,7 +3986,7 @@
           <a:noFill/>
         </p:spPr>
         <p:txBody>
-          <a:bodyPr wrap="square" lIns="18288" rIns="18288" tIns="13716" bIns="13716">
+          <a:bodyPr wrap="square" anchor="t" lIns="18288" rIns="18288" tIns="13716" bIns="13716">
             <a:noAutofit/>
           </a:bodyPr>
           <a:lstStyle/>
@@ -4041,7 +4041,7 @@
           <a:noFill/>
         </p:spPr>
         <p:txBody>
-          <a:bodyPr wrap="square" lIns="18288" rIns="18288" tIns="13716" bIns="13716">
+          <a:bodyPr wrap="square" anchor="t" lIns="18288" rIns="18288" tIns="13716" bIns="13716">
             <a:noAutofit/>
           </a:bodyPr>
           <a:lstStyle/>
@@ -4096,7 +4096,7 @@
           <a:noFill/>
         </p:spPr>
         <p:txBody>
-          <a:bodyPr wrap="square" lIns="18288" rIns="18288" tIns="13716" bIns="13716">
+          <a:bodyPr wrap="square" anchor="t" lIns="18288" rIns="18288" tIns="13716" bIns="13716">
             <a:noAutofit/>
           </a:bodyPr>
           <a:lstStyle/>
@@ -4241,7 +4241,7 @@
           <a:noFill/>
         </p:spPr>
         <p:txBody>
-          <a:bodyPr wrap="square" lIns="18288" rIns="18288" tIns="13716" bIns="13716">
+          <a:bodyPr wrap="square" anchor="t" lIns="18288" rIns="18288" tIns="13716" bIns="13716">
             <a:noAutofit/>
           </a:bodyPr>
           <a:lstStyle/>
@@ -4296,7 +4296,7 @@
           <a:noFill/>
         </p:spPr>
         <p:txBody>
-          <a:bodyPr wrap="square" lIns="18288" rIns="18288" tIns="13716" bIns="13716">
+          <a:bodyPr wrap="square" anchor="t" lIns="18288" rIns="18288" tIns="13716" bIns="13716">
             <a:noAutofit/>
           </a:bodyPr>
           <a:lstStyle/>
@@ -4351,7 +4351,7 @@
           <a:noFill/>
         </p:spPr>
         <p:txBody>
-          <a:bodyPr wrap="square" lIns="18288" rIns="18288" tIns="13716" bIns="13716">
+          <a:bodyPr wrap="square" anchor="t" lIns="18288" rIns="18288" tIns="13716" bIns="13716">
             <a:noAutofit/>
           </a:bodyPr>
           <a:lstStyle/>
@@ -4496,7 +4496,7 @@
           <a:noFill/>
         </p:spPr>
         <p:txBody>
-          <a:bodyPr wrap="square" lIns="18288" rIns="18288" tIns="13716" bIns="13716">
+          <a:bodyPr wrap="square" anchor="t" lIns="18288" rIns="18288" tIns="13716" bIns="13716">
             <a:noAutofit/>
           </a:bodyPr>
           <a:lstStyle/>
@@ -4551,7 +4551,7 @@
           <a:noFill/>
         </p:spPr>
         <p:txBody>
-          <a:bodyPr wrap="square" lIns="18288" rIns="18288" tIns="13716" bIns="13716">
+          <a:bodyPr wrap="square" anchor="t" lIns="18288" rIns="18288" tIns="13716" bIns="13716">
             <a:noAutofit/>
           </a:bodyPr>
           <a:lstStyle/>
@@ -4606,7 +4606,7 @@
           <a:noFill/>
         </p:spPr>
         <p:txBody>
-          <a:bodyPr wrap="square" lIns="18288" rIns="18288" tIns="13716" bIns="13716">
+          <a:bodyPr wrap="square" anchor="t" lIns="18288" rIns="18288" tIns="13716" bIns="13716">
             <a:noAutofit/>
           </a:bodyPr>
           <a:lstStyle/>
@@ -4751,7 +4751,7 @@
           <a:noFill/>
         </p:spPr>
         <p:txBody>
-          <a:bodyPr wrap="square" lIns="18288" rIns="18288" tIns="13716" bIns="13716">
+          <a:bodyPr wrap="square" anchor="t" lIns="18288" rIns="18288" tIns="13716" bIns="13716">
             <a:noAutofit/>
           </a:bodyPr>
           <a:lstStyle/>
@@ -4806,7 +4806,7 @@
           <a:noFill/>
         </p:spPr>
         <p:txBody>
-          <a:bodyPr wrap="square" lIns="18288" rIns="18288" tIns="13716" bIns="13716">
+          <a:bodyPr wrap="square" anchor="t" lIns="18288" rIns="18288" tIns="13716" bIns="13716">
             <a:noAutofit/>
           </a:bodyPr>
           <a:lstStyle/>
@@ -4861,7 +4861,7 @@
           <a:noFill/>
         </p:spPr>
         <p:txBody>
-          <a:bodyPr wrap="square" lIns="18288" rIns="18288" tIns="13716" bIns="13716">
+          <a:bodyPr wrap="square" anchor="t" lIns="18288" rIns="18288" tIns="13716" bIns="13716">
             <a:noAutofit/>
           </a:bodyPr>
           <a:lstStyle/>
@@ -5006,7 +5006,7 @@
           <a:noFill/>
         </p:spPr>
         <p:txBody>
-          <a:bodyPr wrap="square" lIns="18288" rIns="18288" tIns="13716" bIns="13716">
+          <a:bodyPr wrap="square" anchor="t" lIns="18288" rIns="18288" tIns="13716" bIns="13716">
             <a:noAutofit/>
           </a:bodyPr>
           <a:lstStyle/>
@@ -5061,7 +5061,7 @@
           <a:noFill/>
         </p:spPr>
         <p:txBody>
-          <a:bodyPr wrap="square" lIns="18288" rIns="18288" tIns="13716" bIns="13716">
+          <a:bodyPr wrap="square" anchor="t" lIns="18288" rIns="18288" tIns="13716" bIns="13716">
             <a:noAutofit/>
           </a:bodyPr>
           <a:lstStyle/>
@@ -5116,7 +5116,7 @@
           <a:noFill/>
         </p:spPr>
         <p:txBody>
-          <a:bodyPr wrap="square" lIns="18288" rIns="18288" tIns="13716" bIns="13716">
+          <a:bodyPr wrap="square" anchor="t" lIns="18288" rIns="18288" tIns="13716" bIns="13716">
             <a:noAutofit/>
           </a:bodyPr>
           <a:lstStyle/>
@@ -5261,7 +5261,7 @@
           <a:noFill/>
         </p:spPr>
         <p:txBody>
-          <a:bodyPr wrap="square" lIns="18288" rIns="18288" tIns="13716" bIns="13716">
+          <a:bodyPr wrap="square" anchor="t" lIns="18288" rIns="18288" tIns="13716" bIns="13716">
             <a:noAutofit/>
           </a:bodyPr>
           <a:lstStyle/>
@@ -5316,7 +5316,7 @@
           <a:noFill/>
         </p:spPr>
         <p:txBody>
-          <a:bodyPr wrap="square" lIns="18288" rIns="18288" tIns="13716" bIns="13716">
+          <a:bodyPr wrap="square" anchor="t" lIns="18288" rIns="18288" tIns="13716" bIns="13716">
             <a:noAutofit/>
           </a:bodyPr>
           <a:lstStyle/>
@@ -5371,7 +5371,7 @@
           <a:noFill/>
         </p:spPr>
         <p:txBody>
-          <a:bodyPr wrap="square" lIns="18288" rIns="18288" tIns="13716" bIns="13716">
+          <a:bodyPr wrap="square" anchor="t" lIns="18288" rIns="18288" tIns="13716" bIns="13716">
             <a:noAutofit/>
           </a:bodyPr>
           <a:lstStyle/>
